--- a/presentacion/InmoVisita-Presentacion.pptx
+++ b/presentacion/InmoVisita-Presentacion.pptx
@@ -8690,7 +8690,7 @@
                 <a:ea typeface="Calibri" pitchFamily="34" charset="-122"/>
                 <a:cs typeface="Calibri" pitchFamily="34" charset="-120"/>
               </a:rPr>
-              <a:t>Código, documentación técnica y esta presentación:  github.com/USUARIO/inmovisita</a:t>
+              <a:t>Código, documentación técnica y esta presentación:  github.com/sgrlrichterl/inmovisita</a:t>
             </a:r>
             <a:endParaRPr lang="en-US" sz="1300" dirty="0"/>
           </a:p>
